--- a/dist/초3/국어/문학과매체/초3_국어_문학과매체_02_감각적표현_학생용.pptx
+++ b/dist/초3/국어/문학과매체/초3_국어_문학과매체_02_감각적표현_학생용.pptx
@@ -119,13 +119,13 @@
   <p:extLst>
     <p:ext uri="{521415D9-36F7-43E2-AB2F-B90AF26B5E84}">
       <p14:sectionLst xmlns:p14="http://schemas.microsoft.com/office/powerpoint/2010/main">
-        <p14:section name="도입" id="{47299fc0-2f84-a89b-8eae-5ff0fc5a3fbe}">
+        <p14:section name="도입" id="{7a73d7cf-67e3-c771-e917-970de809c327}">
           <p14:sldIdLst>
             <p14:sldId id="256"/>
             <p14:sldId id="257"/>
           </p14:sldIdLst>
         </p14:section>
-        <p14:section name="개념" id="{75690b7e-f13e-c364-672f-25370b72bb9f}">
+        <p14:section name="개념" id="{4e30179f-ed51-9cd0-f0ba-e5f0a583b8db}">
           <p14:sldIdLst>
             <p14:sldId id="258"/>
             <p14:sldId id="259"/>
@@ -133,25 +133,25 @@
             <p14:sldId id="261"/>
           </p14:sldIdLst>
         </p14:section>
-        <p14:section name="연습" id="{b5ee9b0d-b7ce-a6d9-db67-9f7816e233c4}">
+        <p14:section name="연습" id="{68220d8c-71bb-0eb2-ba57-b1536a6aa749}">
           <p14:sldIdLst>
             <p14:sldId id="262"/>
             <p14:sldId id="263"/>
             <p14:sldId id="264"/>
           </p14:sldIdLst>
         </p14:section>
-        <p14:section name="확인" id="{1dc9e71e-2bcf-3a9d-df9f-8e79ff4b2e18}">
+        <p14:section name="확인" id="{f4363097-5fe0-1e24-4a6e-b70f4f3a7a3e}">
           <p14:sldIdLst>
             <p14:sldId id="265"/>
             <p14:sldId id="266"/>
           </p14:sldIdLst>
         </p14:section>
-        <p14:section name="정리" id="{21b3013d-0816-df24-2031-ed8d6a9de3e4}">
+        <p14:section name="정리" id="{249ec195-6227-1d7a-eb32-9ce45cefe7ad}">
           <p14:sldIdLst>
             <p14:sldId id="267"/>
           </p14:sldIdLst>
         </p14:section>
-        <p14:section name="보충" id="{5630cb5a-ffd2-02c3-7779-34d2f445f8f7}">
+        <p14:section name="보충" id="{1c75bf48-0cba-f5b1-7b88-d4df4fe79c49}">
           <p14:sldIdLst>
             <p14:sldId id="268"/>
           </p14:sldIdLst>
